--- a/canvas_material/lectures/powerpoint/Session12-ArchitectureWorkshop.pptx
+++ b/canvas_material/lectures/powerpoint/Session12-ArchitectureWorkshop.pptx
@@ -14045,7 +14045,7 @@
                 <a:ea typeface="Calibri" pitchFamily="34" charset="-122"/>
                 <a:cs typeface="Calibri" pitchFamily="34" charset="-120"/>
               </a:rPr>
-              <a:t>A photo of a whiteboard is a legitimate diagram for the draft. The boards are the work — tonight is transcription.</a:t>
+              <a:t>A photo of a whiteboard is a legitimate diagram for the draft. The boards are the work — what follows is transcription.</a:t>
             </a:r>
             <a:endParaRPr lang="en-US" sz="1700" dirty="0"/>
           </a:p>
@@ -14368,7 +14368,7 @@
                 <a:ea typeface="Calibri" pitchFamily="34" charset="-122"/>
                 <a:cs typeface="Calibri" pitchFamily="34" charset="-120"/>
               </a:rPr>
-              <a:t>Design Document draft — end of day tomorrow, Thu, Oct 15
+              <a:t>Design Document draft — end of day Fri, Oct 16
 </a:t>
             </a:r>
             <a:pPr indent="0" marL="0">
@@ -14386,7 +14386,7 @@
                 <a:ea typeface="Calibri" pitchFamily="34" charset="-122"/>
                 <a:cs typeface="Calibri" pitchFamily="34" charset="-120"/>
               </a:rPr>
-              <a:t>Photographed diagrams + skeleton prose + your two argued decisions. That's a complete draft.</a:t>
+              <a:t>Photographed diagrams + skeleton prose + your two argued decisions. Commit it as docs/design.md and upload a copy to Canvas.</a:t>
             </a:r>
             <a:endParaRPr lang="en-US" sz="1650" dirty="0"/>
           </a:p>
@@ -16428,7 +16428,7 @@
                 <a:ea typeface="Cambria" pitchFamily="34" charset="-122"/>
                 <a:cs typeface="Cambria" pitchFamily="34" charset="-120"/>
               </a:rPr>
-              <a:t>Five rounds — and the draft writes itself tonight</a:t>
+              <a:t>Five rounds — and the draft is mostly written here</a:t>
             </a:r>
             <a:endParaRPr lang="en-US" sz="3100" dirty="0"/>
           </a:p>
@@ -17446,7 +17446,7 @@
                 <a:ea typeface="Calibri" pitchFamily="34" charset="-122"/>
                 <a:cs typeface="Calibri" pitchFamily="34" charset="-120"/>
               </a:rPr>
-              <a:t>Each round fills a numbered section of the template, in order. Tonight is transcription, not composition.</a:t>
+              <a:t>Each round fills a numbered section of the template, in order. What follows is transcription, not composition.</a:t>
             </a:r>
             <a:endParaRPr lang="en-US" sz="1550" dirty="0"/>
           </a:p>
